--- a/artifacts/LiteBroker_security Ховроненко Зюков Кэп-0Х-24.pptx
+++ b/artifacts/LiteBroker_security Ховроненко Зюков Кэп-0Х-24.pptx
@@ -2130,6 +2130,90 @@
           </a:p>
         </p:txBody>
       </p:sp>
+      <p:sp>
+        <p:nvSpPr>
+          <p:cNvPr id="3" name="TextBox 2">
+            <a:extLst>
+              <a:ext uri="{FF2B5EF4-FFF2-40B4-BE49-F238E27FC236}">
+                <a16:creationId xmlns:a16="http://schemas.microsoft.com/office/drawing/2014/main" id="{A0495E10-6E10-1390-9207-9D436E8CABE8}"/>
+              </a:ext>
+            </a:extLst>
+          </p:cNvPr>
+          <p:cNvSpPr txBox="1"/>
+          <p:nvPr/>
+        </p:nvSpPr>
+        <p:spPr>
+          <a:xfrm>
+            <a:off x="1371600" y="4978400"/>
+            <a:ext cx="2294313" cy="276999"/>
+          </a:xfrm>
+          <a:prstGeom prst="rect">
+            <a:avLst/>
+          </a:prstGeom>
+          <a:noFill/>
+        </p:spPr>
+        <p:txBody>
+          <a:bodyPr wrap="square" rtlCol="0">
+            <a:spAutoFit/>
+          </a:bodyPr>
+          <a:lstStyle/>
+          <a:p>
+            <a:r>
+              <a:rPr lang="ru-RU" sz="1200" dirty="0">
+                <a:solidFill>
+                  <a:schemeClr val="bg2">
+                    <a:lumMod val="90000"/>
+                  </a:schemeClr>
+                </a:solidFill>
+                <a:latin typeface="Impact" panose="020B0806030902050204" pitchFamily="34" charset="0"/>
+              </a:rPr>
+              <a:t>КЭП-01-24</a:t>
+            </a:r>
+          </a:p>
+        </p:txBody>
+      </p:sp>
+      <p:sp>
+        <p:nvSpPr>
+          <p:cNvPr id="6" name="TextBox 5">
+            <a:extLst>
+              <a:ext uri="{FF2B5EF4-FFF2-40B4-BE49-F238E27FC236}">
+                <a16:creationId xmlns:a16="http://schemas.microsoft.com/office/drawing/2014/main" id="{333D5DE3-B02D-0EFC-96E0-8035E933E070}"/>
+              </a:ext>
+            </a:extLst>
+          </p:cNvPr>
+          <p:cNvSpPr txBox="1"/>
+          <p:nvPr/>
+        </p:nvSpPr>
+        <p:spPr>
+          <a:xfrm>
+            <a:off x="3543315" y="4978400"/>
+            <a:ext cx="2294313" cy="276999"/>
+          </a:xfrm>
+          <a:prstGeom prst="rect">
+            <a:avLst/>
+          </a:prstGeom>
+          <a:noFill/>
+        </p:spPr>
+        <p:txBody>
+          <a:bodyPr wrap="square" rtlCol="0">
+            <a:spAutoFit/>
+          </a:bodyPr>
+          <a:lstStyle/>
+          <a:p>
+            <a:r>
+              <a:rPr lang="ru-RU" sz="1200" dirty="0">
+                <a:solidFill>
+                  <a:schemeClr val="bg2">
+                    <a:lumMod val="90000"/>
+                  </a:schemeClr>
+                </a:solidFill>
+                <a:latin typeface="Impact" panose="020B0806030902050204" pitchFamily="34" charset="0"/>
+              </a:rPr>
+              <a:t>КЭП-03-24</a:t>
+            </a:r>
+          </a:p>
+        </p:txBody>
+      </p:sp>
     </p:spTree>
     <p:extLst>
       <p:ext uri="{BB962C8B-B14F-4D97-AF65-F5344CB8AC3E}">
@@ -2314,14 +2398,6 @@
             <a:pPr marL="0" indent="0">
               <a:buNone/>
             </a:pPr>
-            <a:r>
-              <a:rPr lang="en-US" sz="750" dirty="0">
-                <a:solidFill>
-                  <a:srgbClr val="7F8EA0"/>
-                </a:solidFill>
-              </a:rPr>
-              <a:t>Источники: securitybydesign.ru/templates, ЛК_3</a:t>
-            </a:r>
             <a:endParaRPr lang="en-US" sz="750" dirty="0"/>
           </a:p>
         </p:txBody>
@@ -2620,14 +2696,6 @@
             <a:pPr marL="0" indent="0">
               <a:buNone/>
             </a:pPr>
-            <a:r>
-              <a:rPr lang="en-US" sz="750" dirty="0">
-                <a:solidFill>
-                  <a:srgbClr val="7F8EA0"/>
-                </a:solidFill>
-              </a:rPr>
-              <a:t>Источники: refactoringu.ru — каталог паттернов проектирования</a:t>
-            </a:r>
             <a:endParaRPr lang="en-US" sz="750" dirty="0"/>
           </a:p>
         </p:txBody>
@@ -2739,7 +2807,7 @@
                   <a:srgbClr val="F5F8FB"/>
                 </a:solidFill>
               </a:rPr>
-              <a:t>UI работает через REST API и не знает деталей Kafka/SQLite.</a:t>
+              <a:t>UI работает через REST API и не знает деталей Kafka/локальная БД.</a:t>
             </a:r>
             <a:endParaRPr lang="en-US" sz="1220" dirty="0"/>
           </a:p>
@@ -3309,14 +3377,6 @@
             <a:pPr marL="0" indent="0">
               <a:buNone/>
             </a:pPr>
-            <a:r>
-              <a:rPr lang="en-US" sz="750" dirty="0">
-                <a:solidFill>
-                  <a:srgbClr val="7F8EA0"/>
-                </a:solidFill>
-              </a:rPr>
-              <a:t>Источники: ЛР_2, ЛР_3, ЛК_3, UML_лк__, securitybydesign.ru/templates, refactoringu.ru</a:t>
-            </a:r>
             <a:endParaRPr lang="en-US" sz="750" dirty="0"/>
           </a:p>
         </p:txBody>
@@ -3902,14 +3962,6 @@
             <a:pPr marL="0" indent="0">
               <a:buNone/>
             </a:pPr>
-            <a:r>
-              <a:rPr lang="en-US" sz="750" dirty="0">
-                <a:solidFill>
-                  <a:srgbClr val="7F8EA0"/>
-                </a:solidFill>
-              </a:rPr>
-              <a:t>Источники: ЛР_2, ЛР_3, ЛК_3, UML_лк__, securitybydesign.ru/templates, refactoringu.ru</a:t>
-            </a:r>
             <a:endParaRPr lang="en-US" sz="750" dirty="0"/>
           </a:p>
         </p:txBody>
@@ -4396,14 +4448,6 @@
             <a:pPr marL="0" indent="0">
               <a:buNone/>
             </a:pPr>
-            <a:r>
-              <a:rPr lang="en-US" sz="750" dirty="0">
-                <a:solidFill>
-                  <a:srgbClr val="7F8EA0"/>
-                </a:solidFill>
-              </a:rPr>
-              <a:t>Источники: ЛР_2, ЛР_3, ЛК_3, UML_лк__, securitybydesign.ru/templates, refactoringu.ru</a:t>
-            </a:r>
             <a:endParaRPr lang="en-US" sz="750" dirty="0"/>
           </a:p>
         </p:txBody>
@@ -4724,14 +4768,6 @@
             <a:pPr marL="0" indent="0">
               <a:buNone/>
             </a:pPr>
-            <a:r>
-              <a:rPr lang="en-US" sz="750" dirty="0">
-                <a:solidFill>
-                  <a:srgbClr val="7F8EA0"/>
-                </a:solidFill>
-              </a:rPr>
-              <a:t>Источники: ЛК_3 — требования NEAT для доменов и монитора безопасности</a:t>
-            </a:r>
             <a:endParaRPr lang="en-US" sz="750" dirty="0"/>
           </a:p>
         </p:txBody>
@@ -5259,14 +5295,6 @@
             <a:pPr marL="0" indent="0">
               <a:buNone/>
             </a:pPr>
-            <a:r>
-              <a:rPr lang="en-US" sz="750" dirty="0">
-                <a:solidFill>
-                  <a:srgbClr val="7F8EA0"/>
-                </a:solidFill>
-              </a:rPr>
-              <a:t>Источники: ЛР_2, ЛР_3, ЛК_3, UML_лк__, securitybydesign.ru/templates, refactoringu.ru</a:t>
-            </a:r>
             <a:endParaRPr lang="en-US" sz="750" dirty="0"/>
           </a:p>
         </p:txBody>
@@ -5358,7 +5386,7 @@
                   <a:srgbClr val="F5F8FB"/>
                 </a:solidFill>
               </a:rPr>
-              <a:t>SQLite выбран для локального учебного хранения без внешней БД.</a:t>
+              <a:t>локальная БД выбран для локального учебного хранения без внешней БД.</a:t>
             </a:r>
             <a:endParaRPr lang="en-US" sz="1420" dirty="0"/>
           </a:p>
@@ -5391,7 +5419,23 @@
                   <a:srgbClr val="F5F8FB"/>
                 </a:solidFill>
               </a:rPr>
-              <a:t>UML используется для объяснения структуры и сценария, как требуется в ЛР_3.</a:t>
+              <a:t>UML используется для объяснения структуры и </a:t>
+            </a:r>
+            <a:r>
+              <a:rPr lang="en-US" sz="1420" dirty="0" err="1">
+                <a:solidFill>
+                  <a:srgbClr val="F5F8FB"/>
+                </a:solidFill>
+              </a:rPr>
+              <a:t>сценария</a:t>
+            </a:r>
+            <a:r>
+              <a:rPr lang="en-US" sz="1420" dirty="0">
+                <a:solidFill>
+                  <a:srgbClr val="F5F8FB"/>
+                </a:solidFill>
+              </a:rPr>
+              <a:t>.</a:t>
             </a:r>
             <a:endParaRPr lang="en-US" sz="1420" dirty="0"/>
           </a:p>
@@ -6211,14 +6255,6 @@
             <a:pPr marL="0" indent="0">
               <a:buNone/>
             </a:pPr>
-            <a:r>
-              <a:rPr lang="en-US" sz="750" dirty="0">
-                <a:solidFill>
-                  <a:srgbClr val="7F8EA0"/>
-                </a:solidFill>
-              </a:rPr>
-              <a:t>Источники: ЛР_2, ЛР_3, ЛК_3, UML_лк__, securitybydesign.ru/templates, refactoringu.ru</a:t>
-            </a:r>
             <a:endParaRPr lang="en-US" sz="750" dirty="0"/>
           </a:p>
         </p:txBody>
@@ -6321,7 +6357,7 @@
                   <a:srgbClr val="F5F8FB"/>
                 </a:solidFill>
               </a:rPr>
-              <a:t>Сообщения сохраняются в SQLite и Kafka не открытым текстом, а криптоконтейнером.</a:t>
+              <a:t>Сообщения сохраняются в локальная БД и Kafka не открытым текстом, а криптоконтейнером.</a:t>
             </a:r>
             <a:endParaRPr lang="en-US" sz="1500" dirty="0"/>
           </a:p>
@@ -6699,14 +6735,6 @@
             <a:pPr marL="0" indent="0">
               <a:buNone/>
             </a:pPr>
-            <a:r>
-              <a:rPr lang="en-US" sz="750" dirty="0">
-                <a:solidFill>
-                  <a:srgbClr val="7F8EA0"/>
-                </a:solidFill>
-              </a:rPr>
-              <a:t>Источники: ЛР_2 — концепция безопасности, ценности, сценарии, риски</a:t>
-            </a:r>
             <a:endParaRPr lang="en-US" sz="750" dirty="0"/>
           </a:p>
         </p:txBody>
@@ -7043,7 +7071,7 @@
         </p:spPr>
         <p:txBody>
           <a:bodyPr wrap="square" rtlCol="0" anchor="ctr">
-            <a:normAutofit/>
+            <a:normAutofit fontScale="92500"/>
           </a:bodyPr>
           <a:lstStyle/>
           <a:p>
@@ -7056,7 +7084,7 @@
                   <a:srgbClr val="F5F8FB"/>
                 </a:solidFill>
               </a:rPr>
-              <a:t>Kafka / SQLite</a:t>
+              <a:t>Kafka / локальная БД</a:t>
             </a:r>
             <a:endParaRPr lang="en-US" sz="1350" dirty="0"/>
           </a:p>
@@ -7405,14 +7433,6 @@
             <a:pPr marL="0" indent="0">
               <a:buNone/>
             </a:pPr>
-            <a:r>
-              <a:rPr lang="en-US" sz="750" dirty="0">
-                <a:solidFill>
-                  <a:srgbClr val="7F8EA0"/>
-                </a:solidFill>
-              </a:rPr>
-              <a:t>Источники: ЛР_2, ЛР_3, ЛК_3, UML_лк__, securitybydesign.ru/templates, refactoringu.ru</a:t>
-            </a:r>
             <a:endParaRPr lang="en-US" sz="750" dirty="0"/>
           </a:p>
         </p:txBody>
@@ -7720,7 +7740,7 @@
                   <a:srgbClr val="F5F8FB"/>
                 </a:solidFill>
               </a:rPr>
-              <a:t>SQLite — локальное хранилище приложения;</a:t>
+              <a:t>локальная БД — локальное хранилище приложения;</a:t>
             </a:r>
             <a:endParaRPr lang="en-US" sz="1400" dirty="0"/>
           </a:p>
@@ -7916,14 +7936,6 @@
             <a:pPr marL="0" indent="0">
               <a:buNone/>
             </a:pPr>
-            <a:r>
-              <a:rPr lang="en-US" sz="750" dirty="0">
-                <a:solidFill>
-                  <a:srgbClr val="7F8EA0"/>
-                </a:solidFill>
-              </a:rPr>
-              <a:t>Источники: ЛК_3 — политики безопасности, монитор безопасности, NEAT</a:t>
-            </a:r>
             <a:endParaRPr lang="en-US" sz="750" dirty="0"/>
           </a:p>
         </p:txBody>
@@ -8705,14 +8717,6 @@
             <a:pPr marL="0" indent="0">
               <a:buNone/>
             </a:pPr>
-            <a:r>
-              <a:rPr lang="en-US" sz="750" dirty="0">
-                <a:solidFill>
-                  <a:srgbClr val="7F8EA0"/>
-                </a:solidFill>
-              </a:rPr>
-              <a:t>Источники: ЛР_3 — диаграммы последовательности, временная ось, сообщения</a:t>
-            </a:r>
             <a:endParaRPr lang="en-US" sz="750" dirty="0"/>
           </a:p>
         </p:txBody>
@@ -9154,7 +9158,7 @@
                   <a:srgbClr val="F5F8FB"/>
                 </a:solidFill>
               </a:rPr>
-              <a:t>SQLite</a:t>
+              <a:t>локальная БД</a:t>
             </a:r>
             <a:endParaRPr lang="en-US" sz="1200" dirty="0"/>
           </a:p>
@@ -9826,14 +9830,6 @@
             <a:pPr marL="0" indent="0">
               <a:buNone/>
             </a:pPr>
-            <a:r>
-              <a:rPr lang="en-US" sz="750" dirty="0">
-                <a:solidFill>
-                  <a:srgbClr val="7F8EA0"/>
-                </a:solidFill>
-              </a:rPr>
-              <a:t>Источники: ЛР_2, ЛР_3, ЛК_3, UML_лк__, securitybydesign.ru/templates, refactoringu.ru</a:t>
-            </a:r>
             <a:endParaRPr lang="en-US" sz="750" dirty="0"/>
           </a:p>
         </p:txBody>
@@ -9925,7 +9921,7 @@
                   <a:srgbClr val="F5F8FB"/>
                 </a:solidFill>
               </a:rPr>
-              <a:t>API boundary: браузер не получает доступ к SQLite/Kafka напрямую.</a:t>
+              <a:t>API boundary: браузер не получает доступ к локальная БД/Kafka напрямую.</a:t>
             </a:r>
             <a:endParaRPr lang="en-US" sz="1500" dirty="0"/>
           </a:p>
